--- a/01_你好世界/docs/课件.pptx
+++ b/01_你好世界/docs/课件.pptx
@@ -3476,7 +3476,7 @@
                 </a:solidFill>
                 <a:latin typeface="微软雅黑"/>
               </a:rPr>
-              <a:t>从程序员到软件框架 —— C语言插件框架演进之旅</a:t>
+              <a:t>从程序员到架构师 —— C语言插件框架演进之旅</a:t>
             </a:r>
           </a:p>
         </p:txBody>
@@ -6674,7 +6674,7 @@
                 </a:solidFill>
                 <a:latin typeface="微软雅黑"/>
               </a:rPr>
-              <a:t>从程序员到软件框架 · 第01讲</a:t>
+              <a:t>从程序员到架构师 · 第01讲</a:t>
             </a:r>
           </a:p>
         </p:txBody>
